--- a/output_pptx/Broken_Vessels_Amazing_Grace.pptx
+++ b/output_pptx/Broken_Vessels_Amazing_Grace.pptx
@@ -3117,8 +3117,8 @@
         </p:nvSpPr>
         <p:spPr>
           <a:xfrm>
-            <a:off x="594360" y="1837944"/>
-            <a:ext cx="11002975" cy="685800"/>
+            <a:off x="640080" y="1650492"/>
+            <a:ext cx="10911535" cy="731520"/>
           </a:xfrm>
           <a:prstGeom prst="rect">
             <a:avLst/>
@@ -3133,7 +3133,7 @@
           <a:p>
             <a:pPr algn="ctr"/>
             <a:r>
-              <a:rPr sz="4400" b="1" i="0">
+              <a:rPr sz="4800" b="1" i="0">
                 <a:solidFill>
                   <a:srgbClr val="FFFFFF"/>
                 </a:solidFill>
@@ -3152,8 +3152,8 @@
         </p:nvSpPr>
         <p:spPr>
           <a:xfrm>
-            <a:off x="594360" y="2560320"/>
-            <a:ext cx="11002975" cy="384048"/>
+            <a:off x="640080" y="2418588"/>
+            <a:ext cx="10911535" cy="365760"/>
           </a:xfrm>
           <a:prstGeom prst="rect">
             <a:avLst/>
@@ -3170,7 +3170,7 @@
             <a:r>
               <a:rPr sz="2400" b="0" i="1">
                 <a:solidFill>
-                  <a:srgbClr val="B4B4B4"/>
+                  <a:srgbClr val="AAAAAA"/>
                 </a:solidFill>
                 <a:latin typeface="Arial"/>
               </a:rPr>
@@ -3187,8 +3187,8 @@
         </p:nvSpPr>
         <p:spPr>
           <a:xfrm>
-            <a:off x="594360" y="2980944"/>
-            <a:ext cx="11002975" cy="347472"/>
+            <a:off x="640080" y="2985516"/>
+            <a:ext cx="10911535" cy="731520"/>
           </a:xfrm>
           <a:prstGeom prst="rect">
             <a:avLst/>
@@ -3203,13 +3203,13 @@
           <a:p>
             <a:pPr algn="ctr"/>
             <a:r>
-              <a:rPr sz="2000" b="0" i="1">
-                <a:solidFill>
-                  <a:srgbClr val="8C8C8C"/>
+              <a:rPr sz="4800" b="1" i="0">
+                <a:solidFill>
+                  <a:srgbClr val="FFFFFF"/>
                 </a:solidFill>
                 <a:latin typeface="Arial"/>
               </a:rPr>
-              <a:t/>
+              <a:t>あなたは見捨てない 自由をもらった</a:t>
             </a:r>
           </a:p>
         </p:txBody>
@@ -3222,8 +3222,8 @@
         </p:nvSpPr>
         <p:spPr>
           <a:xfrm>
-            <a:off x="594360" y="3529584"/>
-            <a:ext cx="11002975" cy="685800"/>
+            <a:off x="640080" y="3753612"/>
+            <a:ext cx="10911535" cy="365760"/>
           </a:xfrm>
           <a:prstGeom prst="rect">
             <a:avLst/>
@@ -3238,13 +3238,13 @@
           <a:p>
             <a:pPr algn="ctr"/>
             <a:r>
-              <a:rPr sz="4400" b="1" i="0">
-                <a:solidFill>
-                  <a:srgbClr val="FFFFFF"/>
+              <a:rPr sz="2400" b="0" i="1">
+                <a:solidFill>
+                  <a:srgbClr val="AAAAAA"/>
                 </a:solidFill>
                 <a:latin typeface="Arial"/>
               </a:rPr>
-              <a:t>あなたは見捨てない 自由をもらった</a:t>
+              <a:t>anata wa misutenai jiyuu wo moratta</a:t>
             </a:r>
           </a:p>
         </p:txBody>
@@ -3257,8 +3257,8 @@
         </p:nvSpPr>
         <p:spPr>
           <a:xfrm>
-            <a:off x="594360" y="4251960"/>
-            <a:ext cx="11002975" cy="384048"/>
+            <a:off x="640080" y="4530852"/>
+            <a:ext cx="10911535" cy="310896"/>
           </a:xfrm>
           <a:prstGeom prst="rect">
             <a:avLst/>
@@ -3273,13 +3273,13 @@
           <a:p>
             <a:pPr algn="ctr"/>
             <a:r>
-              <a:rPr sz="2400" b="0" i="1">
-                <a:solidFill>
-                  <a:srgbClr val="B4B4B4"/>
+              <a:rPr sz="2000" b="0" i="1">
+                <a:solidFill>
+                  <a:srgbClr val="828282"/>
                 </a:solidFill>
                 <a:latin typeface="Arial"/>
               </a:rPr>
-              <a:t>anata wa misutenai jiyuu wo moratta</a:t>
+              <a:t>Mas por Sua graça</a:t>
             </a:r>
           </a:p>
         </p:txBody>
@@ -3292,8 +3292,8 @@
         </p:nvSpPr>
         <p:spPr>
           <a:xfrm>
-            <a:off x="594360" y="4672584"/>
-            <a:ext cx="11002975" cy="347472"/>
+            <a:off x="640080" y="4896612"/>
+            <a:ext cx="10911535" cy="310896"/>
           </a:xfrm>
           <a:prstGeom prst="rect">
             <a:avLst/>
@@ -3310,11 +3310,11 @@
             <a:r>
               <a:rPr sz="2000" b="0" i="1">
                 <a:solidFill>
-                  <a:srgbClr val="8C8C8C"/>
+                  <a:srgbClr val="828282"/>
                 </a:solidFill>
                 <a:latin typeface="Arial"/>
               </a:rPr>
-              <a:t/>
+              <a:t>Refeito sou</a:t>
             </a:r>
           </a:p>
         </p:txBody>
@@ -3353,8 +3353,8 @@
         </p:nvSpPr>
         <p:spPr>
           <a:xfrm>
-            <a:off x="594360" y="1837944"/>
-            <a:ext cx="11002975" cy="685800"/>
+            <a:off x="640080" y="1650492"/>
+            <a:ext cx="10911535" cy="731520"/>
           </a:xfrm>
           <a:prstGeom prst="rect">
             <a:avLst/>
@@ -3369,7 +3369,7 @@
           <a:p>
             <a:pPr algn="ctr"/>
             <a:r>
-              <a:rPr sz="4400" b="1" i="0">
+              <a:rPr sz="4800" b="1" i="0">
                 <a:solidFill>
                   <a:srgbClr val="FFFFFF"/>
                 </a:solidFill>
@@ -3388,8 +3388,8 @@
         </p:nvSpPr>
         <p:spPr>
           <a:xfrm>
-            <a:off x="594360" y="2560320"/>
-            <a:ext cx="11002975" cy="384048"/>
+            <a:off x="640080" y="2418588"/>
+            <a:ext cx="10911535" cy="365760"/>
           </a:xfrm>
           <a:prstGeom prst="rect">
             <a:avLst/>
@@ -3406,7 +3406,7 @@
             <a:r>
               <a:rPr sz="2400" b="0" i="1">
                 <a:solidFill>
-                  <a:srgbClr val="B4B4B4"/>
+                  <a:srgbClr val="AAAAAA"/>
                 </a:solidFill>
                 <a:latin typeface="Arial"/>
               </a:rPr>
@@ -3423,8 +3423,8 @@
         </p:nvSpPr>
         <p:spPr>
           <a:xfrm>
-            <a:off x="594360" y="2980944"/>
-            <a:ext cx="11002975" cy="347472"/>
+            <a:off x="640080" y="2985516"/>
+            <a:ext cx="10911535" cy="731520"/>
           </a:xfrm>
           <a:prstGeom prst="rect">
             <a:avLst/>
@@ -3439,13 +3439,13 @@
           <a:p>
             <a:pPr algn="ctr"/>
             <a:r>
-              <a:rPr sz="2000" b="0" i="1">
-                <a:solidFill>
-                  <a:srgbClr val="8C8C8C"/>
+              <a:rPr sz="4800" b="1" i="0">
+                <a:solidFill>
+                  <a:srgbClr val="FFFFFF"/>
                 </a:solidFill>
                 <a:latin typeface="Arial"/>
               </a:rPr>
-              <a:t/>
+              <a:t>この身の汚れを知れる我に</a:t>
             </a:r>
           </a:p>
         </p:txBody>
@@ -3458,8 +3458,8 @@
         </p:nvSpPr>
         <p:spPr>
           <a:xfrm>
-            <a:off x="594360" y="3529584"/>
-            <a:ext cx="11002975" cy="685800"/>
+            <a:off x="640080" y="3753612"/>
+            <a:ext cx="10911535" cy="365760"/>
           </a:xfrm>
           <a:prstGeom prst="rect">
             <a:avLst/>
@@ -3474,13 +3474,13 @@
           <a:p>
             <a:pPr algn="ctr"/>
             <a:r>
-              <a:rPr sz="4400" b="1" i="0">
-                <a:solidFill>
-                  <a:srgbClr val="FFFFFF"/>
+              <a:rPr sz="2400" b="0" i="1">
+                <a:solidFill>
+                  <a:srgbClr val="AAAAAA"/>
                 </a:solidFill>
                 <a:latin typeface="Arial"/>
               </a:rPr>
-              <a:t>この身の汚れを知れる我に</a:t>
+              <a:t>kono mi no kegare wo shireru ware ni</a:t>
             </a:r>
           </a:p>
         </p:txBody>
@@ -3493,8 +3493,8 @@
         </p:nvSpPr>
         <p:spPr>
           <a:xfrm>
-            <a:off x="594360" y="4251960"/>
-            <a:ext cx="11002975" cy="384048"/>
+            <a:off x="640080" y="4530852"/>
+            <a:ext cx="10911535" cy="310896"/>
           </a:xfrm>
           <a:prstGeom prst="rect">
             <a:avLst/>
@@ -3509,13 +3509,13 @@
           <a:p>
             <a:pPr algn="ctr"/>
             <a:r>
-              <a:rPr sz="2400" b="0" i="1">
-                <a:solidFill>
-                  <a:srgbClr val="B4B4B4"/>
+              <a:rPr sz="2000" b="0" i="1">
+                <a:solidFill>
+                  <a:srgbClr val="828282"/>
                 </a:solidFill>
                 <a:latin typeface="Arial"/>
               </a:rPr>
-              <a:t>kono mi no kegare wo shireru ware ni</a:t>
+              <a:t>Me libertou</a:t>
             </a:r>
           </a:p>
         </p:txBody>
@@ -3528,8 +3528,8 @@
         </p:nvSpPr>
         <p:spPr>
           <a:xfrm>
-            <a:off x="594360" y="4672584"/>
-            <a:ext cx="11002975" cy="347472"/>
+            <a:off x="640080" y="4896612"/>
+            <a:ext cx="10911535" cy="310896"/>
           </a:xfrm>
           <a:prstGeom prst="rect">
             <a:avLst/>
@@ -3546,11 +3546,11 @@
             <a:r>
               <a:rPr sz="2000" b="0" i="1">
                 <a:solidFill>
-                  <a:srgbClr val="8C8C8C"/>
+                  <a:srgbClr val="828282"/>
                 </a:solidFill>
                 <a:latin typeface="Arial"/>
               </a:rPr>
-              <a:t/>
+              <a:t>Me libertou</a:t>
             </a:r>
           </a:p>
         </p:txBody>
@@ -3589,8 +3589,8 @@
         </p:nvSpPr>
         <p:spPr>
           <a:xfrm>
-            <a:off x="594360" y="2258568"/>
-            <a:ext cx="11002975" cy="685800"/>
+            <a:off x="640080" y="2052828"/>
+            <a:ext cx="10911535" cy="731520"/>
           </a:xfrm>
           <a:prstGeom prst="rect">
             <a:avLst/>
@@ -3605,7 +3605,7 @@
           <a:p>
             <a:pPr algn="ctr"/>
             <a:r>
-              <a:rPr sz="4400" b="1" i="0">
+              <a:rPr sz="4800" b="1" i="0">
                 <a:solidFill>
                   <a:srgbClr val="FFFFFF"/>
                 </a:solidFill>
@@ -3624,8 +3624,8 @@
         </p:nvSpPr>
         <p:spPr>
           <a:xfrm>
-            <a:off x="594360" y="2980944"/>
-            <a:ext cx="11002975" cy="347472"/>
+            <a:off x="640080" y="2985516"/>
+            <a:ext cx="10911535" cy="731520"/>
           </a:xfrm>
           <a:prstGeom prst="rect">
             <a:avLst/>
@@ -3640,83 +3640,13 @@
           <a:p>
             <a:pPr algn="ctr"/>
             <a:r>
-              <a:rPr sz="2200" b="0" i="1">
-                <a:solidFill>
-                  <a:srgbClr val="8C8C8C"/>
-                </a:solidFill>
-                <a:latin typeface="Arial"/>
-              </a:rPr>
-              <a:t/>
-            </a:r>
-          </a:p>
-        </p:txBody>
-      </p:sp>
-      <p:sp>
-        <p:nvSpPr>
-          <p:cNvPr id="4" name="TextBox 3"/>
-          <p:cNvSpPr txBox="1"/>
-          <p:nvPr/>
-        </p:nvSpPr>
-        <p:spPr>
-          <a:xfrm>
-            <a:off x="594360" y="3529584"/>
-            <a:ext cx="11002975" cy="685800"/>
-          </a:xfrm>
-          <a:prstGeom prst="rect">
-            <a:avLst/>
-          </a:prstGeom>
-          <a:noFill/>
-        </p:spPr>
-        <p:txBody>
-          <a:bodyPr wrap="square">
-            <a:spAutoFit/>
-          </a:bodyPr>
-          <a:lstStyle/>
-          <a:p>
-            <a:pPr algn="ctr"/>
-            <a:r>
-              <a:rPr sz="4400" b="1" i="0">
+              <a:rPr sz="4800" b="1" i="0">
                 <a:solidFill>
                   <a:srgbClr val="FFFFFF"/>
                 </a:solidFill>
                 <a:latin typeface="Arial"/>
               </a:rPr>
               <a:t>Em mim está</a:t>
-            </a:r>
-          </a:p>
-        </p:txBody>
-      </p:sp>
-      <p:sp>
-        <p:nvSpPr>
-          <p:cNvPr id="5" name="TextBox 4"/>
-          <p:cNvSpPr txBox="1"/>
-          <p:nvPr/>
-        </p:nvSpPr>
-        <p:spPr>
-          <a:xfrm>
-            <a:off x="594360" y="4251960"/>
-            <a:ext cx="11002975" cy="347472"/>
-          </a:xfrm>
-          <a:prstGeom prst="rect">
-            <a:avLst/>
-          </a:prstGeom>
-          <a:noFill/>
-        </p:spPr>
-        <p:txBody>
-          <a:bodyPr wrap="square">
-            <a:spAutoFit/>
-          </a:bodyPr>
-          <a:lstStyle/>
-          <a:p>
-            <a:pPr algn="ctr"/>
-            <a:r>
-              <a:rPr sz="2200" b="0" i="1">
-                <a:solidFill>
-                  <a:srgbClr val="8C8C8C"/>
-                </a:solidFill>
-                <a:latin typeface="Arial"/>
-              </a:rPr>
-              <a:t/>
             </a:r>
           </a:p>
         </p:txBody>
@@ -3755,8 +3685,8 @@
         </p:nvSpPr>
         <p:spPr>
           <a:xfrm>
-            <a:off x="594360" y="2258568"/>
-            <a:ext cx="11002975" cy="685800"/>
+            <a:off x="640080" y="2052828"/>
+            <a:ext cx="10911535" cy="731520"/>
           </a:xfrm>
           <a:prstGeom prst="rect">
             <a:avLst/>
@@ -3771,7 +3701,7 @@
           <a:p>
             <a:pPr algn="ctr"/>
             <a:r>
-              <a:rPr sz="4400" b="1" i="0">
+              <a:rPr sz="4800" b="1" i="0">
                 <a:solidFill>
                   <a:srgbClr val="FFFFFF"/>
                 </a:solidFill>
@@ -3790,8 +3720,8 @@
         </p:nvSpPr>
         <p:spPr>
           <a:xfrm>
-            <a:off x="594360" y="2980944"/>
-            <a:ext cx="11002975" cy="347472"/>
+            <a:off x="640080" y="2985516"/>
+            <a:ext cx="10911535" cy="731520"/>
           </a:xfrm>
           <a:prstGeom prst="rect">
             <a:avLst/>
@@ -3806,83 +3736,13 @@
           <a:p>
             <a:pPr algn="ctr"/>
             <a:r>
-              <a:rPr sz="2200" b="0" i="1">
-                <a:solidFill>
-                  <a:srgbClr val="8C8C8C"/>
-                </a:solidFill>
-                <a:latin typeface="Arial"/>
-              </a:rPr>
-              <a:t/>
-            </a:r>
-          </a:p>
-        </p:txBody>
-      </p:sp>
-      <p:sp>
-        <p:nvSpPr>
-          <p:cNvPr id="4" name="TextBox 3"/>
-          <p:cNvSpPr txBox="1"/>
-          <p:nvPr/>
-        </p:nvSpPr>
-        <p:spPr>
-          <a:xfrm>
-            <a:off x="594360" y="3529584"/>
-            <a:ext cx="11002975" cy="685800"/>
-          </a:xfrm>
-          <a:prstGeom prst="rect">
-            <a:avLst/>
-          </a:prstGeom>
-          <a:noFill/>
-        </p:spPr>
-        <p:txBody>
-          <a:bodyPr wrap="square">
-            <a:spAutoFit/>
-          </a:bodyPr>
-          <a:lstStyle/>
-          <a:p>
-            <a:pPr algn="ctr"/>
-            <a:r>
-              <a:rPr sz="4400" b="1" i="0">
+              <a:rPr sz="4800" b="1" i="0">
                 <a:solidFill>
                   <a:srgbClr val="FFFFFF"/>
                 </a:solidFill>
                 <a:latin typeface="Arial"/>
               </a:rPr>
               <a:t>Serei Teu vaso</a:t>
-            </a:r>
-          </a:p>
-        </p:txBody>
-      </p:sp>
-      <p:sp>
-        <p:nvSpPr>
-          <p:cNvPr id="5" name="TextBox 4"/>
-          <p:cNvSpPr txBox="1"/>
-          <p:nvPr/>
-        </p:nvSpPr>
-        <p:spPr>
-          <a:xfrm>
-            <a:off x="594360" y="4251960"/>
-            <a:ext cx="11002975" cy="347472"/>
-          </a:xfrm>
-          <a:prstGeom prst="rect">
-            <a:avLst/>
-          </a:prstGeom>
-          <a:noFill/>
-        </p:spPr>
-        <p:txBody>
-          <a:bodyPr wrap="square">
-            <a:spAutoFit/>
-          </a:bodyPr>
-          <a:lstStyle/>
-          <a:p>
-            <a:pPr algn="ctr"/>
-            <a:r>
-              <a:rPr sz="2200" b="0" i="1">
-                <a:solidFill>
-                  <a:srgbClr val="8C8C8C"/>
-                </a:solidFill>
-                <a:latin typeface="Arial"/>
-              </a:rPr>
-              <a:t/>
             </a:r>
           </a:p>
         </p:txBody>
@@ -3921,8 +3781,8 @@
         </p:nvSpPr>
         <p:spPr>
           <a:xfrm>
-            <a:off x="594360" y="2258568"/>
-            <a:ext cx="11002975" cy="685800"/>
+            <a:off x="640080" y="2052828"/>
+            <a:ext cx="10911535" cy="731520"/>
           </a:xfrm>
           <a:prstGeom prst="rect">
             <a:avLst/>
@@ -3937,7 +3797,7 @@
           <a:p>
             <a:pPr algn="ctr"/>
             <a:r>
-              <a:rPr sz="4400" b="1" i="0">
+              <a:rPr sz="4800" b="1" i="0">
                 <a:solidFill>
                   <a:srgbClr val="FFFFFF"/>
                 </a:solidFill>
@@ -3956,8 +3816,8 @@
         </p:nvSpPr>
         <p:spPr>
           <a:xfrm>
-            <a:off x="594360" y="2980944"/>
-            <a:ext cx="11002975" cy="347472"/>
+            <a:off x="640080" y="2985516"/>
+            <a:ext cx="10911535" cy="731520"/>
           </a:xfrm>
           <a:prstGeom prst="rect">
             <a:avLst/>
@@ -3972,83 +3832,13 @@
           <a:p>
             <a:pPr algn="ctr"/>
             <a:r>
-              <a:rPr sz="2200" b="0" i="1">
-                <a:solidFill>
-                  <a:srgbClr val="8C8C8C"/>
-                </a:solidFill>
-                <a:latin typeface="Arial"/>
-              </a:rPr>
-              <a:t/>
-            </a:r>
-          </a:p>
-        </p:txBody>
-      </p:sp>
-      <p:sp>
-        <p:nvSpPr>
-          <p:cNvPr id="4" name="TextBox 3"/>
-          <p:cNvSpPr txBox="1"/>
-          <p:nvPr/>
-        </p:nvSpPr>
-        <p:spPr>
-          <a:xfrm>
-            <a:off x="594360" y="3529584"/>
-            <a:ext cx="11002975" cy="685800"/>
-          </a:xfrm>
-          <a:prstGeom prst="rect">
-            <a:avLst/>
-          </a:prstGeom>
-          <a:noFill/>
-        </p:spPr>
-        <p:txBody>
-          <a:bodyPr wrap="square">
-            <a:spAutoFit/>
-          </a:bodyPr>
-          <a:lstStyle/>
-          <a:p>
-            <a:pPr algn="ctr"/>
-            <a:r>
-              <a:rPr sz="4400" b="1" i="0">
+              <a:rPr sz="4800" b="1" i="0">
                 <a:solidFill>
                   <a:srgbClr val="FFFFFF"/>
                 </a:solidFill>
                 <a:latin typeface="Arial"/>
               </a:rPr>
               <a:t>Sublime graça</a:t>
-            </a:r>
-          </a:p>
-        </p:txBody>
-      </p:sp>
-      <p:sp>
-        <p:nvSpPr>
-          <p:cNvPr id="5" name="TextBox 4"/>
-          <p:cNvSpPr txBox="1"/>
-          <p:nvPr/>
-        </p:nvSpPr>
-        <p:spPr>
-          <a:xfrm>
-            <a:off x="594360" y="4251960"/>
-            <a:ext cx="11002975" cy="347472"/>
-          </a:xfrm>
-          <a:prstGeom prst="rect">
-            <a:avLst/>
-          </a:prstGeom>
-          <a:noFill/>
-        </p:spPr>
-        <p:txBody>
-          <a:bodyPr wrap="square">
-            <a:spAutoFit/>
-          </a:bodyPr>
-          <a:lstStyle/>
-          <a:p>
-            <a:pPr algn="ctr"/>
-            <a:r>
-              <a:rPr sz="2200" b="0" i="1">
-                <a:solidFill>
-                  <a:srgbClr val="8C8C8C"/>
-                </a:solidFill>
-                <a:latin typeface="Arial"/>
-              </a:rPr>
-              <a:t/>
             </a:r>
           </a:p>
         </p:txBody>
@@ -4087,8 +3877,8 @@
         </p:nvSpPr>
         <p:spPr>
           <a:xfrm>
-            <a:off x="594360" y="2258568"/>
-            <a:ext cx="11002975" cy="685800"/>
+            <a:off x="640080" y="2052828"/>
+            <a:ext cx="10911535" cy="731520"/>
           </a:xfrm>
           <a:prstGeom prst="rect">
             <a:avLst/>
@@ -4103,7 +3893,7 @@
           <a:p>
             <a:pPr algn="ctr"/>
             <a:r>
-              <a:rPr sz="4400" b="1" i="0">
+              <a:rPr sz="4800" b="1" i="0">
                 <a:solidFill>
                   <a:srgbClr val="FFFFFF"/>
                 </a:solidFill>
@@ -4122,8 +3912,8 @@
         </p:nvSpPr>
         <p:spPr>
           <a:xfrm>
-            <a:off x="594360" y="2980944"/>
-            <a:ext cx="11002975" cy="347472"/>
+            <a:off x="640080" y="2985516"/>
+            <a:ext cx="10911535" cy="731520"/>
           </a:xfrm>
           <a:prstGeom prst="rect">
             <a:avLst/>
@@ -4138,83 +3928,13 @@
           <a:p>
             <a:pPr algn="ctr"/>
             <a:r>
-              <a:rPr sz="2200" b="0" i="1">
-                <a:solidFill>
-                  <a:srgbClr val="8C8C8C"/>
-                </a:solidFill>
-                <a:latin typeface="Arial"/>
-              </a:rPr>
-              <a:t/>
-            </a:r>
-          </a:p>
-        </p:txBody>
-      </p:sp>
-      <p:sp>
-        <p:nvSpPr>
-          <p:cNvPr id="4" name="TextBox 3"/>
-          <p:cNvSpPr txBox="1"/>
-          <p:nvPr/>
-        </p:nvSpPr>
-        <p:spPr>
-          <a:xfrm>
-            <a:off x="594360" y="3529584"/>
-            <a:ext cx="11002975" cy="685800"/>
-          </a:xfrm>
-          <a:prstGeom prst="rect">
-            <a:avLst/>
-          </a:prstGeom>
-          <a:noFill/>
-        </p:spPr>
-        <p:txBody>
-          <a:bodyPr wrap="square">
-            <a:spAutoFit/>
-          </a:bodyPr>
-          <a:lstStyle/>
-          <a:p>
-            <a:pPr algn="ctr"/>
-            <a:r>
-              <a:rPr sz="4400" b="1" i="0">
+              <a:rPr sz="4800" b="1" i="0">
                 <a:solidFill>
                   <a:srgbClr val="FFFFFF"/>
                 </a:solidFill>
                 <a:latin typeface="Arial"/>
               </a:rPr>
               <a:t>Que salva o pecador</a:t>
-            </a:r>
-          </a:p>
-        </p:txBody>
-      </p:sp>
-      <p:sp>
-        <p:nvSpPr>
-          <p:cNvPr id="5" name="TextBox 4"/>
-          <p:cNvSpPr txBox="1"/>
-          <p:nvPr/>
-        </p:nvSpPr>
-        <p:spPr>
-          <a:xfrm>
-            <a:off x="594360" y="4251960"/>
-            <a:ext cx="11002975" cy="347472"/>
-          </a:xfrm>
-          <a:prstGeom prst="rect">
-            <a:avLst/>
-          </a:prstGeom>
-          <a:noFill/>
-        </p:spPr>
-        <p:txBody>
-          <a:bodyPr wrap="square">
-            <a:spAutoFit/>
-          </a:bodyPr>
-          <a:lstStyle/>
-          <a:p>
-            <a:pPr algn="ctr"/>
-            <a:r>
-              <a:rPr sz="2200" b="0" i="1">
-                <a:solidFill>
-                  <a:srgbClr val="8C8C8C"/>
-                </a:solidFill>
-                <a:latin typeface="Arial"/>
-              </a:rPr>
-              <a:t/>
             </a:r>
           </a:p>
         </p:txBody>
@@ -4253,8 +3973,8 @@
         </p:nvSpPr>
         <p:spPr>
           <a:xfrm>
-            <a:off x="594360" y="1837944"/>
-            <a:ext cx="11002975" cy="685800"/>
+            <a:off x="640080" y="1650492"/>
+            <a:ext cx="10911535" cy="731520"/>
           </a:xfrm>
           <a:prstGeom prst="rect">
             <a:avLst/>
@@ -4269,7 +3989,7 @@
           <a:p>
             <a:pPr algn="ctr"/>
             <a:r>
-              <a:rPr sz="4400" b="1" i="0">
+              <a:rPr sz="4800" b="1" i="0">
                 <a:solidFill>
                   <a:srgbClr val="FFFFFF"/>
                 </a:solidFill>
@@ -4288,8 +4008,8 @@
         </p:nvSpPr>
         <p:spPr>
           <a:xfrm>
-            <a:off x="594360" y="2560320"/>
-            <a:ext cx="11002975" cy="384048"/>
+            <a:off x="640080" y="2418588"/>
+            <a:ext cx="10911535" cy="365760"/>
           </a:xfrm>
           <a:prstGeom prst="rect">
             <a:avLst/>
@@ -4306,7 +4026,7 @@
             <a:r>
               <a:rPr sz="2400" b="0" i="1">
                 <a:solidFill>
-                  <a:srgbClr val="B4B4B4"/>
+                  <a:srgbClr val="AAAAAA"/>
                 </a:solidFill>
                 <a:latin typeface="Arial"/>
               </a:rPr>
@@ -4323,8 +4043,8 @@
         </p:nvSpPr>
         <p:spPr>
           <a:xfrm>
-            <a:off x="594360" y="2980944"/>
-            <a:ext cx="11002975" cy="347472"/>
+            <a:off x="640080" y="2985516"/>
+            <a:ext cx="10911535" cy="731520"/>
           </a:xfrm>
           <a:prstGeom prst="rect">
             <a:avLst/>
@@ -4339,13 +4059,13 @@
           <a:p>
             <a:pPr algn="ctr"/>
             <a:r>
-              <a:rPr sz="2000" b="0" i="1">
-                <a:solidFill>
-                  <a:srgbClr val="8C8C8C"/>
+              <a:rPr sz="4800" b="1" i="0">
+                <a:solidFill>
+                  <a:srgbClr val="FFFFFF"/>
                 </a:solidFill>
                 <a:latin typeface="Arial"/>
               </a:rPr>
-              <a:t/>
+              <a:t>この身の汚れを知れる我に</a:t>
             </a:r>
           </a:p>
         </p:txBody>
@@ -4358,8 +4078,8 @@
         </p:nvSpPr>
         <p:spPr>
           <a:xfrm>
-            <a:off x="594360" y="3529584"/>
-            <a:ext cx="11002975" cy="685800"/>
+            <a:off x="640080" y="3753612"/>
+            <a:ext cx="10911535" cy="365760"/>
           </a:xfrm>
           <a:prstGeom prst="rect">
             <a:avLst/>
@@ -4374,13 +4094,13 @@
           <a:p>
             <a:pPr algn="ctr"/>
             <a:r>
-              <a:rPr sz="4400" b="1" i="0">
-                <a:solidFill>
-                  <a:srgbClr val="FFFFFF"/>
+              <a:rPr sz="2400" b="0" i="1">
+                <a:solidFill>
+                  <a:srgbClr val="AAAAAA"/>
                 </a:solidFill>
                 <a:latin typeface="Arial"/>
               </a:rPr>
-              <a:t>この身の汚れを知れる我に</a:t>
+              <a:t>kono mi no kegare wo shireru ware ni</a:t>
             </a:r>
           </a:p>
         </p:txBody>
@@ -4393,8 +4113,8 @@
         </p:nvSpPr>
         <p:spPr>
           <a:xfrm>
-            <a:off x="594360" y="4251960"/>
-            <a:ext cx="11002975" cy="384048"/>
+            <a:off x="640080" y="4530852"/>
+            <a:ext cx="10911535" cy="310896"/>
           </a:xfrm>
           <a:prstGeom prst="rect">
             <a:avLst/>
@@ -4409,13 +4129,13 @@
           <a:p>
             <a:pPr algn="ctr"/>
             <a:r>
-              <a:rPr sz="2400" b="0" i="1">
-                <a:solidFill>
-                  <a:srgbClr val="B4B4B4"/>
+              <a:rPr sz="2000" b="0" i="1">
+                <a:solidFill>
+                  <a:srgbClr val="828282"/>
                 </a:solidFill>
                 <a:latin typeface="Arial"/>
               </a:rPr>
-              <a:t>kono mi no kegare wo shireru ware ni</a:t>
+              <a:t>Me libertou</a:t>
             </a:r>
           </a:p>
         </p:txBody>
@@ -4428,8 +4148,8 @@
         </p:nvSpPr>
         <p:spPr>
           <a:xfrm>
-            <a:off x="594360" y="4672584"/>
-            <a:ext cx="11002975" cy="347472"/>
+            <a:off x="640080" y="4896612"/>
+            <a:ext cx="10911535" cy="310896"/>
           </a:xfrm>
           <a:prstGeom prst="rect">
             <a:avLst/>
@@ -4446,11 +4166,11 @@
             <a:r>
               <a:rPr sz="2000" b="0" i="1">
                 <a:solidFill>
-                  <a:srgbClr val="8C8C8C"/>
+                  <a:srgbClr val="828282"/>
                 </a:solidFill>
                 <a:latin typeface="Arial"/>
               </a:rPr>
-              <a:t/>
+              <a:t>Me libertou</a:t>
             </a:r>
           </a:p>
         </p:txBody>
@@ -4489,8 +4209,8 @@
         </p:nvSpPr>
         <p:spPr>
           <a:xfrm>
-            <a:off x="594360" y="1837944"/>
-            <a:ext cx="11002975" cy="685800"/>
+            <a:off x="640080" y="1650492"/>
+            <a:ext cx="10911535" cy="731520"/>
           </a:xfrm>
           <a:prstGeom prst="rect">
             <a:avLst/>
@@ -4505,7 +4225,7 @@
           <a:p>
             <a:pPr algn="ctr"/>
             <a:r>
-              <a:rPr sz="4400" b="1" i="0">
+              <a:rPr sz="4800" b="1" i="0">
                 <a:solidFill>
                   <a:srgbClr val="FFFFFF"/>
                 </a:solidFill>
@@ -4524,8 +4244,8 @@
         </p:nvSpPr>
         <p:spPr>
           <a:xfrm>
-            <a:off x="594360" y="2560320"/>
-            <a:ext cx="11002975" cy="384048"/>
+            <a:off x="640080" y="2418588"/>
+            <a:ext cx="10911535" cy="365760"/>
           </a:xfrm>
           <a:prstGeom prst="rect">
             <a:avLst/>
@@ -4542,7 +4262,7 @@
             <a:r>
               <a:rPr sz="2400" b="0" i="1">
                 <a:solidFill>
-                  <a:srgbClr val="B4B4B4"/>
+                  <a:srgbClr val="AAAAAA"/>
                 </a:solidFill>
                 <a:latin typeface="Arial"/>
               </a:rPr>
@@ -4559,8 +4279,8 @@
         </p:nvSpPr>
         <p:spPr>
           <a:xfrm>
-            <a:off x="594360" y="2980944"/>
-            <a:ext cx="11002975" cy="347472"/>
+            <a:off x="640080" y="2985516"/>
+            <a:ext cx="10911535" cy="731520"/>
           </a:xfrm>
           <a:prstGeom prst="rect">
             <a:avLst/>
@@ -4575,13 +4295,13 @@
           <a:p>
             <a:pPr algn="ctr"/>
             <a:r>
-              <a:rPr sz="2000" b="0" i="1">
-                <a:solidFill>
-                  <a:srgbClr val="8C8C8C"/>
+              <a:rPr sz="4800" b="1" i="0">
+                <a:solidFill>
+                  <a:srgbClr val="FFFFFF"/>
                 </a:solidFill>
                 <a:latin typeface="Arial"/>
               </a:rPr>
-              <a:t/>
+              <a:t>十字架が    心を捕らえた</a:t>
             </a:r>
           </a:p>
         </p:txBody>
@@ -4594,8 +4314,8 @@
         </p:nvSpPr>
         <p:spPr>
           <a:xfrm>
-            <a:off x="594360" y="3529584"/>
-            <a:ext cx="11002975" cy="685800"/>
+            <a:off x="640080" y="3753612"/>
+            <a:ext cx="10911535" cy="365760"/>
           </a:xfrm>
           <a:prstGeom prst="rect">
             <a:avLst/>
@@ -4610,13 +4330,13 @@
           <a:p>
             <a:pPr algn="ctr"/>
             <a:r>
-              <a:rPr sz="4400" b="1" i="0">
-                <a:solidFill>
-                  <a:srgbClr val="FFFFFF"/>
+              <a:rPr sz="2400" b="0" i="1">
+                <a:solidFill>
+                  <a:srgbClr val="AAAAAA"/>
                 </a:solidFill>
                 <a:latin typeface="Arial"/>
               </a:rPr>
-              <a:t>十字架が    心を捕らえた</a:t>
+              <a:t>jyuujika ga Kokoro wo toraeta</a:t>
             </a:r>
           </a:p>
         </p:txBody>
@@ -4629,8 +4349,8 @@
         </p:nvSpPr>
         <p:spPr>
           <a:xfrm>
-            <a:off x="594360" y="4251960"/>
-            <a:ext cx="11002975" cy="384048"/>
+            <a:off x="640080" y="4530852"/>
+            <a:ext cx="10911535" cy="310896"/>
           </a:xfrm>
           <a:prstGeom prst="rect">
             <a:avLst/>
@@ -4645,13 +4365,13 @@
           <a:p>
             <a:pPr algn="ctr"/>
             <a:r>
-              <a:rPr sz="2400" b="0" i="1">
-                <a:solidFill>
-                  <a:srgbClr val="B4B4B4"/>
+              <a:rPr sz="2000" b="0" i="1">
+                <a:solidFill>
+                  <a:srgbClr val="828282"/>
                 </a:solidFill>
                 <a:latin typeface="Arial"/>
               </a:rPr>
-              <a:t>jyuujika ga Kokoro wo toraeta</a:t>
+              <a:t>Sublime graça</a:t>
             </a:r>
           </a:p>
         </p:txBody>
@@ -4664,8 +4384,8 @@
         </p:nvSpPr>
         <p:spPr>
           <a:xfrm>
-            <a:off x="594360" y="4672584"/>
-            <a:ext cx="11002975" cy="347472"/>
+            <a:off x="640080" y="4896612"/>
+            <a:ext cx="10911535" cy="310896"/>
           </a:xfrm>
           <a:prstGeom prst="rect">
             <a:avLst/>
@@ -4682,11 +4402,11 @@
             <a:r>
               <a:rPr sz="2000" b="0" i="1">
                 <a:solidFill>
-                  <a:srgbClr val="8C8C8C"/>
+                  <a:srgbClr val="828282"/>
                 </a:solidFill>
                 <a:latin typeface="Arial"/>
               </a:rPr>
-              <a:t/>
+              <a:t>Doce o som</a:t>
             </a:r>
           </a:p>
         </p:txBody>
@@ -4725,8 +4445,8 @@
         </p:nvSpPr>
         <p:spPr>
           <a:xfrm>
-            <a:off x="594360" y="2258568"/>
-            <a:ext cx="11002975" cy="685800"/>
+            <a:off x="640080" y="2052828"/>
+            <a:ext cx="10911535" cy="731520"/>
           </a:xfrm>
           <a:prstGeom prst="rect">
             <a:avLst/>
@@ -4741,7 +4461,7 @@
           <a:p>
             <a:pPr algn="ctr"/>
             <a:r>
-              <a:rPr sz="4400" b="1" i="0">
+              <a:rPr sz="4800" b="1" i="0">
                 <a:solidFill>
                   <a:srgbClr val="FFFFFF"/>
                 </a:solidFill>
@@ -4760,8 +4480,8 @@
         </p:nvSpPr>
         <p:spPr>
           <a:xfrm>
-            <a:off x="594360" y="2980944"/>
-            <a:ext cx="11002975" cy="347472"/>
+            <a:off x="640080" y="2985516"/>
+            <a:ext cx="10911535" cy="731520"/>
           </a:xfrm>
           <a:prstGeom prst="rect">
             <a:avLst/>
@@ -4776,83 +4496,13 @@
           <a:p>
             <a:pPr algn="ctr"/>
             <a:r>
-              <a:rPr sz="2200" b="0" i="1">
-                <a:solidFill>
-                  <a:srgbClr val="8C8C8C"/>
-                </a:solidFill>
-                <a:latin typeface="Arial"/>
-              </a:rPr>
-              <a:t/>
-            </a:r>
-          </a:p>
-        </p:txBody>
-      </p:sp>
-      <p:sp>
-        <p:nvSpPr>
-          <p:cNvPr id="4" name="TextBox 3"/>
-          <p:cNvSpPr txBox="1"/>
-          <p:nvPr/>
-        </p:nvSpPr>
-        <p:spPr>
-          <a:xfrm>
-            <a:off x="594360" y="3529584"/>
-            <a:ext cx="11002975" cy="685800"/>
-          </a:xfrm>
-          <a:prstGeom prst="rect">
-            <a:avLst/>
-          </a:prstGeom>
-          <a:noFill/>
-        </p:spPr>
-        <p:txBody>
-          <a:bodyPr wrap="square">
-            <a:spAutoFit/>
-          </a:bodyPr>
-          <a:lstStyle/>
-          <a:p>
-            <a:pPr algn="ctr"/>
-            <a:r>
-              <a:rPr sz="4400" b="1" i="0">
+              <a:rPr sz="4800" b="1" i="0">
                 <a:solidFill>
                   <a:srgbClr val="FFFFFF"/>
                 </a:solidFill>
                 <a:latin typeface="Arial"/>
               </a:rPr>
               <a:t>Refeito sou</a:t>
-            </a:r>
-          </a:p>
-        </p:txBody>
-      </p:sp>
-      <p:sp>
-        <p:nvSpPr>
-          <p:cNvPr id="5" name="TextBox 4"/>
-          <p:cNvSpPr txBox="1"/>
-          <p:nvPr/>
-        </p:nvSpPr>
-        <p:spPr>
-          <a:xfrm>
-            <a:off x="594360" y="4251960"/>
-            <a:ext cx="11002975" cy="347472"/>
-          </a:xfrm>
-          <a:prstGeom prst="rect">
-            <a:avLst/>
-          </a:prstGeom>
-          <a:noFill/>
-        </p:spPr>
-        <p:txBody>
-          <a:bodyPr wrap="square">
-            <a:spAutoFit/>
-          </a:bodyPr>
-          <a:lstStyle/>
-          <a:p>
-            <a:pPr algn="ctr"/>
-            <a:r>
-              <a:rPr sz="2200" b="0" i="1">
-                <a:solidFill>
-                  <a:srgbClr val="8C8C8C"/>
-                </a:solidFill>
-                <a:latin typeface="Arial"/>
-              </a:rPr>
-              <a:t/>
             </a:r>
           </a:p>
         </p:txBody>
@@ -4891,8 +4541,8 @@
         </p:nvSpPr>
         <p:spPr>
           <a:xfrm>
-            <a:off x="594360" y="2258568"/>
-            <a:ext cx="11002975" cy="685800"/>
+            <a:off x="640080" y="2052828"/>
+            <a:ext cx="10911535" cy="731520"/>
           </a:xfrm>
           <a:prstGeom prst="rect">
             <a:avLst/>
@@ -4907,7 +4557,7 @@
           <a:p>
             <a:pPr algn="ctr"/>
             <a:r>
-              <a:rPr sz="4400" b="1" i="0">
+              <a:rPr sz="4800" b="1" i="0">
                 <a:solidFill>
                   <a:srgbClr val="FFFFFF"/>
                 </a:solidFill>
@@ -4926,8 +4576,8 @@
         </p:nvSpPr>
         <p:spPr>
           <a:xfrm>
-            <a:off x="594360" y="2980944"/>
-            <a:ext cx="11002975" cy="347472"/>
+            <a:off x="640080" y="2985516"/>
+            <a:ext cx="10911535" cy="731520"/>
           </a:xfrm>
           <a:prstGeom prst="rect">
             <a:avLst/>
@@ -4942,83 +4592,13 @@
           <a:p>
             <a:pPr algn="ctr"/>
             <a:r>
-              <a:rPr sz="2200" b="0" i="1">
-                <a:solidFill>
-                  <a:srgbClr val="8C8C8C"/>
-                </a:solidFill>
-                <a:latin typeface="Arial"/>
-              </a:rPr>
-              <a:t/>
-            </a:r>
-          </a:p>
-        </p:txBody>
-      </p:sp>
-      <p:sp>
-        <p:nvSpPr>
-          <p:cNvPr id="4" name="TextBox 3"/>
-          <p:cNvSpPr txBox="1"/>
-          <p:nvPr/>
-        </p:nvSpPr>
-        <p:spPr>
-          <a:xfrm>
-            <a:off x="594360" y="3529584"/>
-            <a:ext cx="11002975" cy="685800"/>
-          </a:xfrm>
-          <a:prstGeom prst="rect">
-            <a:avLst/>
-          </a:prstGeom>
-          <a:noFill/>
-        </p:spPr>
-        <p:txBody>
-          <a:bodyPr wrap="square">
-            <a:spAutoFit/>
-          </a:bodyPr>
-          <a:lstStyle/>
-          <a:p>
-            <a:pPr algn="ctr"/>
-            <a:r>
-              <a:rPr sz="4400" b="1" i="0">
+              <a:rPr sz="4800" b="1" i="0">
                 <a:solidFill>
                   <a:srgbClr val="FFFFFF"/>
                 </a:solidFill>
                 <a:latin typeface="Arial"/>
               </a:rPr>
               <a:t>Fui resgatado</a:t>
-            </a:r>
-          </a:p>
-        </p:txBody>
-      </p:sp>
-      <p:sp>
-        <p:nvSpPr>
-          <p:cNvPr id="5" name="TextBox 4"/>
-          <p:cNvSpPr txBox="1"/>
-          <p:nvPr/>
-        </p:nvSpPr>
-        <p:spPr>
-          <a:xfrm>
-            <a:off x="594360" y="4251960"/>
-            <a:ext cx="11002975" cy="347472"/>
-          </a:xfrm>
-          <a:prstGeom prst="rect">
-            <a:avLst/>
-          </a:prstGeom>
-          <a:noFill/>
-        </p:spPr>
-        <p:txBody>
-          <a:bodyPr wrap="square">
-            <a:spAutoFit/>
-          </a:bodyPr>
-          <a:lstStyle/>
-          <a:p>
-            <a:pPr algn="ctr"/>
-            <a:r>
-              <a:rPr sz="2200" b="0" i="1">
-                <a:solidFill>
-                  <a:srgbClr val="8C8C8C"/>
-                </a:solidFill>
-                <a:latin typeface="Arial"/>
-              </a:rPr>
-              <a:t/>
             </a:r>
           </a:p>
         </p:txBody>
@@ -5057,8 +4637,8 @@
         </p:nvSpPr>
         <p:spPr>
           <a:xfrm>
-            <a:off x="594360" y="2258568"/>
-            <a:ext cx="11002975" cy="685800"/>
+            <a:off x="640080" y="2052828"/>
+            <a:ext cx="10911535" cy="731520"/>
           </a:xfrm>
           <a:prstGeom prst="rect">
             <a:avLst/>
@@ -5073,7 +4653,7 @@
           <a:p>
             <a:pPr algn="ctr"/>
             <a:r>
-              <a:rPr sz="4400" b="1" i="0">
+              <a:rPr sz="4800" b="1" i="0">
                 <a:solidFill>
                   <a:srgbClr val="FFFFFF"/>
                 </a:solidFill>
@@ -5092,8 +4672,8 @@
         </p:nvSpPr>
         <p:spPr>
           <a:xfrm>
-            <a:off x="594360" y="2980944"/>
-            <a:ext cx="11002975" cy="347472"/>
+            <a:off x="640080" y="2985516"/>
+            <a:ext cx="10911535" cy="731520"/>
           </a:xfrm>
           <a:prstGeom prst="rect">
             <a:avLst/>
@@ -5108,83 +4688,13 @@
           <a:p>
             <a:pPr algn="ctr"/>
             <a:r>
-              <a:rPr sz="2200" b="0" i="1">
-                <a:solidFill>
-                  <a:srgbClr val="8C8C8C"/>
-                </a:solidFill>
-                <a:latin typeface="Arial"/>
-              </a:rPr>
-              <a:t/>
-            </a:r>
-          </a:p>
-        </p:txBody>
-      </p:sp>
-      <p:sp>
-        <p:nvSpPr>
-          <p:cNvPr id="4" name="TextBox 3"/>
-          <p:cNvSpPr txBox="1"/>
-          <p:nvPr/>
-        </p:nvSpPr>
-        <p:spPr>
-          <a:xfrm>
-            <a:off x="594360" y="3529584"/>
-            <a:ext cx="11002975" cy="685800"/>
-          </a:xfrm>
-          <a:prstGeom prst="rect">
-            <a:avLst/>
-          </a:prstGeom>
-          <a:noFill/>
-        </p:spPr>
-        <p:txBody>
-          <a:bodyPr wrap="square">
-            <a:spAutoFit/>
-          </a:bodyPr>
-          <a:lstStyle/>
-          <a:p>
-            <a:pPr algn="ctr"/>
-            <a:r>
-              <a:rPr sz="4400" b="1" i="0">
+              <a:rPr sz="4800" b="1" i="0">
                 <a:solidFill>
                   <a:srgbClr val="FFFFFF"/>
                 </a:solidFill>
                 <a:latin typeface="Arial"/>
               </a:rPr>
               <a:t>Me libertou</a:t>
-            </a:r>
-          </a:p>
-        </p:txBody>
-      </p:sp>
-      <p:sp>
-        <p:nvSpPr>
-          <p:cNvPr id="5" name="TextBox 4"/>
-          <p:cNvSpPr txBox="1"/>
-          <p:nvPr/>
-        </p:nvSpPr>
-        <p:spPr>
-          <a:xfrm>
-            <a:off x="594360" y="4251960"/>
-            <a:ext cx="11002975" cy="347472"/>
-          </a:xfrm>
-          <a:prstGeom prst="rect">
-            <a:avLst/>
-          </a:prstGeom>
-          <a:noFill/>
-        </p:spPr>
-        <p:txBody>
-          <a:bodyPr wrap="square">
-            <a:spAutoFit/>
-          </a:bodyPr>
-          <a:lstStyle/>
-          <a:p>
-            <a:pPr algn="ctr"/>
-            <a:r>
-              <a:rPr sz="2200" b="0" i="1">
-                <a:solidFill>
-                  <a:srgbClr val="8C8C8C"/>
-                </a:solidFill>
-                <a:latin typeface="Arial"/>
-              </a:rPr>
-              <a:t/>
             </a:r>
           </a:p>
         </p:txBody>
@@ -5223,8 +4733,8 @@
         </p:nvSpPr>
         <p:spPr>
           <a:xfrm>
-            <a:off x="594360" y="2258568"/>
-            <a:ext cx="11002975" cy="685800"/>
+            <a:off x="640080" y="2052828"/>
+            <a:ext cx="10911535" cy="731520"/>
           </a:xfrm>
           <a:prstGeom prst="rect">
             <a:avLst/>
@@ -5239,7 +4749,7 @@
           <a:p>
             <a:pPr algn="ctr"/>
             <a:r>
-              <a:rPr sz="4400" b="1" i="0">
+              <a:rPr sz="4800" b="1" i="0">
                 <a:solidFill>
                   <a:srgbClr val="FFFFFF"/>
                 </a:solidFill>
@@ -5258,8 +4768,8 @@
         </p:nvSpPr>
         <p:spPr>
           <a:xfrm>
-            <a:off x="594360" y="2980944"/>
-            <a:ext cx="11002975" cy="347472"/>
+            <a:off x="640080" y="2985516"/>
+            <a:ext cx="10911535" cy="731520"/>
           </a:xfrm>
           <a:prstGeom prst="rect">
             <a:avLst/>
@@ -5274,83 +4784,13 @@
           <a:p>
             <a:pPr algn="ctr"/>
             <a:r>
-              <a:rPr sz="2200" b="0" i="1">
-                <a:solidFill>
-                  <a:srgbClr val="8C8C8C"/>
-                </a:solidFill>
-                <a:latin typeface="Arial"/>
-              </a:rPr>
-              <a:t/>
-            </a:r>
-          </a:p>
-        </p:txBody>
-      </p:sp>
-      <p:sp>
-        <p:nvSpPr>
-          <p:cNvPr id="4" name="TextBox 3"/>
-          <p:cNvSpPr txBox="1"/>
-          <p:nvPr/>
-        </p:nvSpPr>
-        <p:spPr>
-          <a:xfrm>
-            <a:off x="594360" y="3529584"/>
-            <a:ext cx="11002975" cy="685800"/>
-          </a:xfrm>
-          <a:prstGeom prst="rect">
-            <a:avLst/>
-          </a:prstGeom>
-          <a:noFill/>
-        </p:spPr>
-        <p:txBody>
-          <a:bodyPr wrap="square">
-            <a:spAutoFit/>
-          </a:bodyPr>
-          <a:lstStyle/>
-          <a:p>
-            <a:pPr algn="ctr"/>
-            <a:r>
-              <a:rPr sz="4400" b="1" i="0">
+              <a:rPr sz="4800" b="1" i="0">
                 <a:solidFill>
                   <a:srgbClr val="FFFFFF"/>
                 </a:solidFill>
                 <a:latin typeface="Arial"/>
               </a:rPr>
               <a:t>Doce o som</a:t>
-            </a:r>
-          </a:p>
-        </p:txBody>
-      </p:sp>
-      <p:sp>
-        <p:nvSpPr>
-          <p:cNvPr id="5" name="TextBox 4"/>
-          <p:cNvSpPr txBox="1"/>
-          <p:nvPr/>
-        </p:nvSpPr>
-        <p:spPr>
-          <a:xfrm>
-            <a:off x="594360" y="4251960"/>
-            <a:ext cx="11002975" cy="347472"/>
-          </a:xfrm>
-          <a:prstGeom prst="rect">
-            <a:avLst/>
-          </a:prstGeom>
-          <a:noFill/>
-        </p:spPr>
-        <p:txBody>
-          <a:bodyPr wrap="square">
-            <a:spAutoFit/>
-          </a:bodyPr>
-          <a:lstStyle/>
-          <a:p>
-            <a:pPr algn="ctr"/>
-            <a:r>
-              <a:rPr sz="2200" b="0" i="1">
-                <a:solidFill>
-                  <a:srgbClr val="8C8C8C"/>
-                </a:solidFill>
-                <a:latin typeface="Arial"/>
-              </a:rPr>
-              <a:t/>
             </a:r>
           </a:p>
         </p:txBody>
@@ -5389,8 +4829,8 @@
         </p:nvSpPr>
         <p:spPr>
           <a:xfrm>
-            <a:off x="594360" y="2258568"/>
-            <a:ext cx="11002975" cy="685800"/>
+            <a:off x="640080" y="2052828"/>
+            <a:ext cx="10911535" cy="731520"/>
           </a:xfrm>
           <a:prstGeom prst="rect">
             <a:avLst/>
@@ -5405,7 +4845,7 @@
           <a:p>
             <a:pPr algn="ctr"/>
             <a:r>
-              <a:rPr sz="4400" b="1" i="0">
+              <a:rPr sz="4800" b="1" i="0">
                 <a:solidFill>
                   <a:srgbClr val="FFFFFF"/>
                 </a:solidFill>
@@ -5424,8 +4864,8 @@
         </p:nvSpPr>
         <p:spPr>
           <a:xfrm>
-            <a:off x="594360" y="2980944"/>
-            <a:ext cx="11002975" cy="347472"/>
+            <a:off x="640080" y="2985516"/>
+            <a:ext cx="10911535" cy="731520"/>
           </a:xfrm>
           <a:prstGeom prst="rect">
             <a:avLst/>
@@ -5440,83 +4880,13 @@
           <a:p>
             <a:pPr algn="ctr"/>
             <a:r>
-              <a:rPr sz="2200" b="0" i="1">
-                <a:solidFill>
-                  <a:srgbClr val="8C8C8C"/>
-                </a:solidFill>
-                <a:latin typeface="Arial"/>
-              </a:rPr>
-              <a:t/>
-            </a:r>
-          </a:p>
-        </p:txBody>
-      </p:sp>
-      <p:sp>
-        <p:nvSpPr>
-          <p:cNvPr id="4" name="TextBox 3"/>
-          <p:cNvSpPr txBox="1"/>
-          <p:nvPr/>
-        </p:nvSpPr>
-        <p:spPr>
-          <a:xfrm>
-            <a:off x="594360" y="3529584"/>
-            <a:ext cx="11002975" cy="685800"/>
-          </a:xfrm>
-          <a:prstGeom prst="rect">
-            <a:avLst/>
-          </a:prstGeom>
-          <a:noFill/>
-        </p:spPr>
-        <p:txBody>
-          <a:bodyPr wrap="square">
-            <a:spAutoFit/>
-          </a:bodyPr>
-          <a:lstStyle/>
-          <a:p>
-            <a:pPr algn="ctr"/>
-            <a:r>
-              <a:rPr sz="4400" b="1" i="0">
+              <a:rPr sz="4800" b="1" i="0">
                 <a:solidFill>
                   <a:srgbClr val="FFFFFF"/>
                 </a:solidFill>
                 <a:latin typeface="Arial"/>
               </a:rPr>
               <a:t>Posso ver</a:t>
-            </a:r>
-          </a:p>
-        </p:txBody>
-      </p:sp>
-      <p:sp>
-        <p:nvSpPr>
-          <p:cNvPr id="5" name="TextBox 4"/>
-          <p:cNvSpPr txBox="1"/>
-          <p:nvPr/>
-        </p:nvSpPr>
-        <p:spPr>
-          <a:xfrm>
-            <a:off x="594360" y="4251960"/>
-            <a:ext cx="11002975" cy="347472"/>
-          </a:xfrm>
-          <a:prstGeom prst="rect">
-            <a:avLst/>
-          </a:prstGeom>
-          <a:noFill/>
-        </p:spPr>
-        <p:txBody>
-          <a:bodyPr wrap="square">
-            <a:spAutoFit/>
-          </a:bodyPr>
-          <a:lstStyle/>
-          <a:p>
-            <a:pPr algn="ctr"/>
-            <a:r>
-              <a:rPr sz="2200" b="0" i="1">
-                <a:solidFill>
-                  <a:srgbClr val="8C8C8C"/>
-                </a:solidFill>
-                <a:latin typeface="Arial"/>
-              </a:rPr>
-              <a:t/>
             </a:r>
           </a:p>
         </p:txBody>
@@ -5555,8 +4925,8 @@
         </p:nvSpPr>
         <p:spPr>
           <a:xfrm>
-            <a:off x="594360" y="2258568"/>
-            <a:ext cx="11002975" cy="685800"/>
+            <a:off x="640080" y="2052828"/>
+            <a:ext cx="10911535" cy="731520"/>
           </a:xfrm>
           <a:prstGeom prst="rect">
             <a:avLst/>
@@ -5571,7 +4941,7 @@
           <a:p>
             <a:pPr algn="ctr"/>
             <a:r>
-              <a:rPr sz="4400" b="1" i="0">
+              <a:rPr sz="4800" b="1" i="0">
                 <a:solidFill>
                   <a:srgbClr val="FFFFFF"/>
                 </a:solidFill>
@@ -5590,8 +4960,8 @@
         </p:nvSpPr>
         <p:spPr>
           <a:xfrm>
-            <a:off x="594360" y="2980944"/>
-            <a:ext cx="11002975" cy="347472"/>
+            <a:off x="640080" y="2985516"/>
+            <a:ext cx="10911535" cy="731520"/>
           </a:xfrm>
           <a:prstGeom prst="rect">
             <a:avLst/>
@@ -5606,83 +4976,13 @@
           <a:p>
             <a:pPr algn="ctr"/>
             <a:r>
-              <a:rPr sz="2200" b="0" i="1">
-                <a:solidFill>
-                  <a:srgbClr val="8C8C8C"/>
-                </a:solidFill>
-                <a:latin typeface="Arial"/>
-              </a:rPr>
-              <a:t/>
-            </a:r>
-          </a:p>
-        </p:txBody>
-      </p:sp>
-      <p:sp>
-        <p:nvSpPr>
-          <p:cNvPr id="4" name="TextBox 3"/>
-          <p:cNvSpPr txBox="1"/>
-          <p:nvPr/>
-        </p:nvSpPr>
-        <p:spPr>
-          <a:xfrm>
-            <a:off x="594360" y="3529584"/>
-            <a:ext cx="11002975" cy="685800"/>
-          </a:xfrm>
-          <a:prstGeom prst="rect">
-            <a:avLst/>
-          </a:prstGeom>
-          <a:noFill/>
-        </p:spPr>
-        <p:txBody>
-          <a:bodyPr wrap="square">
-            <a:spAutoFit/>
-          </a:bodyPr>
-          <a:lstStyle/>
-          <a:p>
-            <a:pPr algn="ctr"/>
-            <a:r>
-              <a:rPr sz="4400" b="1" i="0">
+              <a:rPr sz="4800" b="1" i="0">
                 <a:solidFill>
                   <a:srgbClr val="FFFFFF"/>
                 </a:solidFill>
                 <a:latin typeface="Arial"/>
               </a:rPr>
               <a:t>Mesmo com falhas</a:t>
-            </a:r>
-          </a:p>
-        </p:txBody>
-      </p:sp>
-      <p:sp>
-        <p:nvSpPr>
-          <p:cNvPr id="5" name="TextBox 4"/>
-          <p:cNvSpPr txBox="1"/>
-          <p:nvPr/>
-        </p:nvSpPr>
-        <p:spPr>
-          <a:xfrm>
-            <a:off x="594360" y="4251960"/>
-            <a:ext cx="11002975" cy="347472"/>
-          </a:xfrm>
-          <a:prstGeom prst="rect">
-            <a:avLst/>
-          </a:prstGeom>
-          <a:noFill/>
-        </p:spPr>
-        <p:txBody>
-          <a:bodyPr wrap="square">
-            <a:spAutoFit/>
-          </a:bodyPr>
-          <a:lstStyle/>
-          <a:p>
-            <a:pPr algn="ctr"/>
-            <a:r>
-              <a:rPr sz="2200" b="0" i="1">
-                <a:solidFill>
-                  <a:srgbClr val="8C8C8C"/>
-                </a:solidFill>
-                <a:latin typeface="Arial"/>
-              </a:rPr>
-              <a:t/>
             </a:r>
           </a:p>
         </p:txBody>

--- a/output_pptx/Broken_Vessels_Amazing_Grace.pptx
+++ b/output_pptx/Broken_Vessels_Amazing_Grace.pptx
@@ -3651,6 +3651,76 @@
           </a:p>
         </p:txBody>
       </p:sp>
+      <p:sp>
+        <p:nvSpPr>
+          <p:cNvPr id="4" name="TextBox 3"/>
+          <p:cNvSpPr txBox="1"/>
+          <p:nvPr/>
+        </p:nvSpPr>
+        <p:spPr>
+          <a:xfrm>
+            <a:off x="640080" y="4128516"/>
+            <a:ext cx="10911535" cy="310896"/>
+          </a:xfrm>
+          <a:prstGeom prst="rect">
+            <a:avLst/>
+          </a:prstGeom>
+          <a:noFill/>
+        </p:spPr>
+        <p:txBody>
+          <a:bodyPr wrap="square">
+            <a:spAutoFit/>
+          </a:bodyPr>
+          <a:lstStyle/>
+          <a:p>
+            <a:pPr algn="ctr"/>
+            <a:r>
+              <a:rPr sz="2000" b="0" i="0">
+                <a:solidFill>
+                  <a:srgbClr val="828282"/>
+                </a:solidFill>
+                <a:latin typeface="Arial"/>
+              </a:rPr>
+              <a:t>あなたの宝は</a:t>
+            </a:r>
+          </a:p>
+        </p:txBody>
+      </p:sp>
+      <p:sp>
+        <p:nvSpPr>
+          <p:cNvPr id="5" name="TextBox 4"/>
+          <p:cNvSpPr txBox="1"/>
+          <p:nvPr/>
+        </p:nvSpPr>
+        <p:spPr>
+          <a:xfrm>
+            <a:off x="640080" y="4494276"/>
+            <a:ext cx="10911535" cy="310896"/>
+          </a:xfrm>
+          <a:prstGeom prst="rect">
+            <a:avLst/>
+          </a:prstGeom>
+          <a:noFill/>
+        </p:spPr>
+        <p:txBody>
+          <a:bodyPr wrap="square">
+            <a:spAutoFit/>
+          </a:bodyPr>
+          <a:lstStyle/>
+          <a:p>
+            <a:pPr algn="ctr"/>
+            <a:r>
+              <a:rPr sz="2000" b="0" i="0">
+                <a:solidFill>
+                  <a:srgbClr val="828282"/>
+                </a:solidFill>
+                <a:latin typeface="Arial"/>
+              </a:rPr>
+              <a:t>私の中にあります</a:t>
+            </a:r>
+          </a:p>
+        </p:txBody>
+      </p:sp>
     </p:spTree>
   </p:cSld>
   <p:clrMapOvr>
@@ -3747,6 +3817,76 @@
           </a:p>
         </p:txBody>
       </p:sp>
+      <p:sp>
+        <p:nvSpPr>
+          <p:cNvPr id="4" name="TextBox 3"/>
+          <p:cNvSpPr txBox="1"/>
+          <p:nvPr/>
+        </p:nvSpPr>
+        <p:spPr>
+          <a:xfrm>
+            <a:off x="640080" y="4128516"/>
+            <a:ext cx="10911535" cy="310896"/>
+          </a:xfrm>
+          <a:prstGeom prst="rect">
+            <a:avLst/>
+          </a:prstGeom>
+          <a:noFill/>
+        </p:spPr>
+        <p:txBody>
+          <a:bodyPr wrap="square">
+            <a:spAutoFit/>
+          </a:bodyPr>
+          <a:lstStyle/>
+          <a:p>
+            <a:pPr algn="ctr"/>
+            <a:r>
+              <a:rPr sz="2000" b="0" i="0">
+                <a:solidFill>
+                  <a:srgbClr val="828282"/>
+                </a:solidFill>
+                <a:latin typeface="Arial"/>
+              </a:rPr>
+              <a:t>私の人生をあなたに捧げます</a:t>
+            </a:r>
+          </a:p>
+        </p:txBody>
+      </p:sp>
+      <p:sp>
+        <p:nvSpPr>
+          <p:cNvPr id="5" name="TextBox 4"/>
+          <p:cNvSpPr txBox="1"/>
+          <p:nvPr/>
+        </p:nvSpPr>
+        <p:spPr>
+          <a:xfrm>
+            <a:off x="640080" y="4494276"/>
+            <a:ext cx="10911535" cy="310896"/>
+          </a:xfrm>
+          <a:prstGeom prst="rect">
+            <a:avLst/>
+          </a:prstGeom>
+          <a:noFill/>
+        </p:spPr>
+        <p:txBody>
+          <a:bodyPr wrap="square">
+            <a:spAutoFit/>
+          </a:bodyPr>
+          <a:lstStyle/>
+          <a:p>
+            <a:pPr algn="ctr"/>
+            <a:r>
+              <a:rPr sz="2000" b="0" i="0">
+                <a:solidFill>
+                  <a:srgbClr val="828282"/>
+                </a:solidFill>
+                <a:latin typeface="Arial"/>
+              </a:rPr>
+              <a:t>あなたの器となります</a:t>
+            </a:r>
+          </a:p>
+        </p:txBody>
+      </p:sp>
     </p:spTree>
   </p:cSld>
   <p:clrMapOvr>
@@ -3843,6 +3983,76 @@
           </a:p>
         </p:txBody>
       </p:sp>
+      <p:sp>
+        <p:nvSpPr>
+          <p:cNvPr id="4" name="TextBox 3"/>
+          <p:cNvSpPr txBox="1"/>
+          <p:nvPr/>
+        </p:nvSpPr>
+        <p:spPr>
+          <a:xfrm>
+            <a:off x="640080" y="4128516"/>
+            <a:ext cx="10911535" cy="310896"/>
+          </a:xfrm>
+          <a:prstGeom prst="rect">
+            <a:avLst/>
+          </a:prstGeom>
+          <a:noFill/>
+        </p:spPr>
+        <p:txBody>
+          <a:bodyPr wrap="square">
+            <a:spAutoFit/>
+          </a:bodyPr>
+          <a:lstStyle/>
+          <a:p>
+            <a:pPr algn="ctr"/>
+            <a:r>
+              <a:rPr sz="2000" b="0" i="0">
+                <a:solidFill>
+                  <a:srgbClr val="828282"/>
+                </a:solidFill>
+                <a:latin typeface="Arial"/>
+              </a:rPr>
+              <a:t>あなたの力</a:t>
+            </a:r>
+          </a:p>
+        </p:txBody>
+      </p:sp>
+      <p:sp>
+        <p:nvSpPr>
+          <p:cNvPr id="5" name="TextBox 4"/>
+          <p:cNvSpPr txBox="1"/>
+          <p:nvPr/>
+        </p:nvSpPr>
+        <p:spPr>
+          <a:xfrm>
+            <a:off x="640080" y="4494276"/>
+            <a:ext cx="10911535" cy="310896"/>
+          </a:xfrm>
+          <a:prstGeom prst="rect">
+            <a:avLst/>
+          </a:prstGeom>
+          <a:noFill/>
+        </p:spPr>
+        <p:txBody>
+          <a:bodyPr wrap="square">
+            <a:spAutoFit/>
+          </a:bodyPr>
+          <a:lstStyle/>
+          <a:p>
+            <a:pPr algn="ctr"/>
+            <a:r>
+              <a:rPr sz="2000" b="0" i="0">
+                <a:solidFill>
+                  <a:srgbClr val="828282"/>
+                </a:solidFill>
+                <a:latin typeface="Arial"/>
+              </a:rPr>
+              <a:t>尊い恵み</a:t>
+            </a:r>
+          </a:p>
+        </p:txBody>
+      </p:sp>
     </p:spTree>
   </p:cSld>
   <p:clrMapOvr>
@@ -3939,6 +4149,76 @@
           </a:p>
         </p:txBody>
       </p:sp>
+      <p:sp>
+        <p:nvSpPr>
+          <p:cNvPr id="4" name="TextBox 3"/>
+          <p:cNvSpPr txBox="1"/>
+          <p:nvPr/>
+        </p:nvSpPr>
+        <p:spPr>
+          <a:xfrm>
+            <a:off x="640080" y="4128516"/>
+            <a:ext cx="10911535" cy="310896"/>
+          </a:xfrm>
+          <a:prstGeom prst="rect">
+            <a:avLst/>
+          </a:prstGeom>
+          <a:noFill/>
+        </p:spPr>
+        <p:txBody>
+          <a:bodyPr wrap="square">
+            <a:spAutoFit/>
+          </a:bodyPr>
+          <a:lstStyle/>
+          <a:p>
+            <a:pPr algn="ctr"/>
+            <a:r>
+              <a:rPr sz="2000" b="0" i="0">
+                <a:solidFill>
+                  <a:srgbClr val="828282"/>
+                </a:solidFill>
+                <a:latin typeface="Arial"/>
+              </a:rPr>
+              <a:t>その音は甘く</a:t>
+            </a:r>
+          </a:p>
+        </p:txBody>
+      </p:sp>
+      <p:sp>
+        <p:nvSpPr>
+          <p:cNvPr id="5" name="TextBox 4"/>
+          <p:cNvSpPr txBox="1"/>
+          <p:nvPr/>
+        </p:nvSpPr>
+        <p:spPr>
+          <a:xfrm>
+            <a:off x="640080" y="4494276"/>
+            <a:ext cx="10911535" cy="310896"/>
+          </a:xfrm>
+          <a:prstGeom prst="rect">
+            <a:avLst/>
+          </a:prstGeom>
+          <a:noFill/>
+        </p:spPr>
+        <p:txBody>
+          <a:bodyPr wrap="square">
+            <a:spAutoFit/>
+          </a:bodyPr>
+          <a:lstStyle/>
+          <a:p>
+            <a:pPr algn="ctr"/>
+            <a:r>
+              <a:rPr sz="2000" b="0" i="0">
+                <a:solidFill>
+                  <a:srgbClr val="828282"/>
+                </a:solidFill>
+                <a:latin typeface="Arial"/>
+              </a:rPr>
+              <a:t>罪人を救う</a:t>
+            </a:r>
+          </a:p>
+        </p:txBody>
+      </p:sp>
     </p:spTree>
   </p:cSld>
   <p:clrMapOvr>
@@ -4507,6 +4787,76 @@
           </a:p>
         </p:txBody>
       </p:sp>
+      <p:sp>
+        <p:nvSpPr>
+          <p:cNvPr id="4" name="TextBox 3"/>
+          <p:cNvSpPr txBox="1"/>
+          <p:nvPr/>
+        </p:nvSpPr>
+        <p:spPr>
+          <a:xfrm>
+            <a:off x="640080" y="4128516"/>
+            <a:ext cx="10911535" cy="310896"/>
+          </a:xfrm>
+          <a:prstGeom prst="rect">
+            <a:avLst/>
+          </a:prstGeom>
+          <a:noFill/>
+        </p:spPr>
+        <p:txBody>
+          <a:bodyPr wrap="square">
+            <a:spAutoFit/>
+          </a:bodyPr>
+          <a:lstStyle/>
+          <a:p>
+            <a:pPr algn="ctr"/>
+            <a:r>
+              <a:rPr sz="2000" b="0" i="0">
+                <a:solidFill>
+                  <a:srgbClr val="828282"/>
+                </a:solidFill>
+                <a:latin typeface="Arial"/>
+              </a:rPr>
+              <a:t>しかし、御恵みにより</a:t>
+            </a:r>
+          </a:p>
+        </p:txBody>
+      </p:sp>
+      <p:sp>
+        <p:nvSpPr>
+          <p:cNvPr id="5" name="TextBox 4"/>
+          <p:cNvSpPr txBox="1"/>
+          <p:nvPr/>
+        </p:nvSpPr>
+        <p:spPr>
+          <a:xfrm>
+            <a:off x="640080" y="4494276"/>
+            <a:ext cx="10911535" cy="310896"/>
+          </a:xfrm>
+          <a:prstGeom prst="rect">
+            <a:avLst/>
+          </a:prstGeom>
+          <a:noFill/>
+        </p:spPr>
+        <p:txBody>
+          <a:bodyPr wrap="square">
+            <a:spAutoFit/>
+          </a:bodyPr>
+          <a:lstStyle/>
+          <a:p>
+            <a:pPr algn="ctr"/>
+            <a:r>
+              <a:rPr sz="2000" b="0" i="0">
+                <a:solidFill>
+                  <a:srgbClr val="828282"/>
+                </a:solidFill>
+                <a:latin typeface="Arial"/>
+              </a:rPr>
+              <a:t>私は新しくされた</a:t>
+            </a:r>
+          </a:p>
+        </p:txBody>
+      </p:sp>
     </p:spTree>
   </p:cSld>
   <p:clrMapOvr>
@@ -4603,6 +4953,76 @@
           </a:p>
         </p:txBody>
       </p:sp>
+      <p:sp>
+        <p:nvSpPr>
+          <p:cNvPr id="4" name="TextBox 3"/>
+          <p:cNvSpPr txBox="1"/>
+          <p:nvPr/>
+        </p:nvSpPr>
+        <p:spPr>
+          <a:xfrm>
+            <a:off x="640080" y="4128516"/>
+            <a:ext cx="10911535" cy="310896"/>
+          </a:xfrm>
+          <a:prstGeom prst="rect">
+            <a:avLst/>
+          </a:prstGeom>
+          <a:noFill/>
+        </p:spPr>
+        <p:txBody>
+          <a:bodyPr wrap="square">
+            <a:spAutoFit/>
+          </a:bodyPr>
+          <a:lstStyle/>
+          <a:p>
+            <a:pPr algn="ctr"/>
+            <a:r>
+              <a:rPr sz="2000" b="0" i="0">
+                <a:solidFill>
+                  <a:srgbClr val="828282"/>
+                </a:solidFill>
+                <a:latin typeface="Arial"/>
+              </a:rPr>
+              <a:t>何ももらわず</a:t>
+            </a:r>
+          </a:p>
+        </p:txBody>
+      </p:sp>
+      <p:sp>
+        <p:nvSpPr>
+          <p:cNvPr id="5" name="TextBox 4"/>
+          <p:cNvSpPr txBox="1"/>
+          <p:nvPr/>
+        </p:nvSpPr>
+        <p:spPr>
+          <a:xfrm>
+            <a:off x="640080" y="4494276"/>
+            <a:ext cx="10911535" cy="310896"/>
+          </a:xfrm>
+          <a:prstGeom prst="rect">
+            <a:avLst/>
+          </a:prstGeom>
+          <a:noFill/>
+        </p:spPr>
+        <p:txBody>
+          <a:bodyPr wrap="square">
+            <a:spAutoFit/>
+          </a:bodyPr>
+          <a:lstStyle/>
+          <a:p>
+            <a:pPr algn="ctr"/>
+            <a:r>
+              <a:rPr sz="2000" b="0" i="0">
+                <a:solidFill>
+                  <a:srgbClr val="828282"/>
+                </a:solidFill>
+                <a:latin typeface="Arial"/>
+              </a:rPr>
+              <a:t>私は救われた</a:t>
+            </a:r>
+          </a:p>
+        </p:txBody>
+      </p:sp>
     </p:spTree>
   </p:cSld>
   <p:clrMapOvr>
@@ -4699,6 +5119,76 @@
           </a:p>
         </p:txBody>
       </p:sp>
+      <p:sp>
+        <p:nvSpPr>
+          <p:cNvPr id="4" name="TextBox 3"/>
+          <p:cNvSpPr txBox="1"/>
+          <p:nvPr/>
+        </p:nvSpPr>
+        <p:spPr>
+          <a:xfrm>
+            <a:off x="640080" y="4128516"/>
+            <a:ext cx="10911535" cy="310896"/>
+          </a:xfrm>
+          <a:prstGeom prst="rect">
+            <a:avLst/>
+          </a:prstGeom>
+          <a:noFill/>
+        </p:spPr>
+        <p:txBody>
+          <a:bodyPr wrap="square">
+            <a:spAutoFit/>
+          </a:bodyPr>
+          <a:lstStyle/>
+          <a:p>
+            <a:pPr algn="ctr"/>
+            <a:r>
+              <a:rPr sz="2000" b="0" i="0">
+                <a:solidFill>
+                  <a:srgbClr val="828282"/>
+                </a:solidFill>
+                <a:latin typeface="Arial"/>
+              </a:rPr>
+              <a:t>私を解放してくださった</a:t>
+            </a:r>
+          </a:p>
+        </p:txBody>
+      </p:sp>
+      <p:sp>
+        <p:nvSpPr>
+          <p:cNvPr id="5" name="TextBox 4"/>
+          <p:cNvSpPr txBox="1"/>
+          <p:nvPr/>
+        </p:nvSpPr>
+        <p:spPr>
+          <a:xfrm>
+            <a:off x="640080" y="4494276"/>
+            <a:ext cx="10911535" cy="310896"/>
+          </a:xfrm>
+          <a:prstGeom prst="rect">
+            <a:avLst/>
+          </a:prstGeom>
+          <a:noFill/>
+        </p:spPr>
+        <p:txBody>
+          <a:bodyPr wrap="square">
+            <a:spAutoFit/>
+          </a:bodyPr>
+          <a:lstStyle/>
+          <a:p>
+            <a:pPr algn="ctr"/>
+            <a:r>
+              <a:rPr sz="2000" b="0" i="0">
+                <a:solidFill>
+                  <a:srgbClr val="828282"/>
+                </a:solidFill>
+                <a:latin typeface="Arial"/>
+              </a:rPr>
+              <a:t>私を解放してくださった</a:t>
+            </a:r>
+          </a:p>
+        </p:txBody>
+      </p:sp>
     </p:spTree>
   </p:cSld>
   <p:clrMapOvr>
@@ -4795,6 +5285,76 @@
           </a:p>
         </p:txBody>
       </p:sp>
+      <p:sp>
+        <p:nvSpPr>
+          <p:cNvPr id="4" name="TextBox 3"/>
+          <p:cNvSpPr txBox="1"/>
+          <p:nvPr/>
+        </p:nvSpPr>
+        <p:spPr>
+          <a:xfrm>
+            <a:off x="640080" y="4128516"/>
+            <a:ext cx="10911535" cy="310896"/>
+          </a:xfrm>
+          <a:prstGeom prst="rect">
+            <a:avLst/>
+          </a:prstGeom>
+          <a:noFill/>
+        </p:spPr>
+        <p:txBody>
+          <a:bodyPr wrap="square">
+            <a:spAutoFit/>
+          </a:bodyPr>
+          <a:lstStyle/>
+          <a:p>
+            <a:pPr algn="ctr"/>
+            <a:r>
+              <a:rPr sz="2000" b="0" i="0">
+                <a:solidFill>
+                  <a:srgbClr val="828282"/>
+                </a:solidFill>
+                <a:latin typeface="Arial"/>
+              </a:rPr>
+              <a:t>尊い恵み</a:t>
+            </a:r>
+          </a:p>
+        </p:txBody>
+      </p:sp>
+      <p:sp>
+        <p:nvSpPr>
+          <p:cNvPr id="5" name="TextBox 4"/>
+          <p:cNvSpPr txBox="1"/>
+          <p:nvPr/>
+        </p:nvSpPr>
+        <p:spPr>
+          <a:xfrm>
+            <a:off x="640080" y="4494276"/>
+            <a:ext cx="10911535" cy="310896"/>
+          </a:xfrm>
+          <a:prstGeom prst="rect">
+            <a:avLst/>
+          </a:prstGeom>
+          <a:noFill/>
+        </p:spPr>
+        <p:txBody>
+          <a:bodyPr wrap="square">
+            <a:spAutoFit/>
+          </a:bodyPr>
+          <a:lstStyle/>
+          <a:p>
+            <a:pPr algn="ctr"/>
+            <a:r>
+              <a:rPr sz="2000" b="0" i="0">
+                <a:solidFill>
+                  <a:srgbClr val="828282"/>
+                </a:solidFill>
+                <a:latin typeface="Arial"/>
+              </a:rPr>
+              <a:t>その音は甘く</a:t>
+            </a:r>
+          </a:p>
+        </p:txBody>
+      </p:sp>
     </p:spTree>
   </p:cSld>
   <p:clrMapOvr>
@@ -4891,6 +5451,76 @@
           </a:p>
         </p:txBody>
       </p:sp>
+      <p:sp>
+        <p:nvSpPr>
+          <p:cNvPr id="4" name="TextBox 3"/>
+          <p:cNvSpPr txBox="1"/>
+          <p:nvPr/>
+        </p:nvSpPr>
+        <p:spPr>
+          <a:xfrm>
+            <a:off x="640080" y="4128516"/>
+            <a:ext cx="10911535" cy="310896"/>
+          </a:xfrm>
+          <a:prstGeom prst="rect">
+            <a:avLst/>
+          </a:prstGeom>
+          <a:noFill/>
+        </p:spPr>
+        <p:txBody>
+          <a:bodyPr wrap="square">
+            <a:spAutoFit/>
+          </a:bodyPr>
+          <a:lstStyle/>
+          <a:p>
+            <a:pPr algn="ctr"/>
+            <a:r>
+              <a:rPr sz="2000" b="0" i="0">
+                <a:solidFill>
+                  <a:srgbClr val="828282"/>
+                </a:solidFill>
+                <a:latin typeface="Arial"/>
+              </a:rPr>
+              <a:t>私は盲目でしたが、今</a:t>
+            </a:r>
+          </a:p>
+        </p:txBody>
+      </p:sp>
+      <p:sp>
+        <p:nvSpPr>
+          <p:cNvPr id="5" name="TextBox 4"/>
+          <p:cNvSpPr txBox="1"/>
+          <p:nvPr/>
+        </p:nvSpPr>
+        <p:spPr>
+          <a:xfrm>
+            <a:off x="640080" y="4494276"/>
+            <a:ext cx="10911535" cy="310896"/>
+          </a:xfrm>
+          <a:prstGeom prst="rect">
+            <a:avLst/>
+          </a:prstGeom>
+          <a:noFill/>
+        </p:spPr>
+        <p:txBody>
+          <a:bodyPr wrap="square">
+            <a:spAutoFit/>
+          </a:bodyPr>
+          <a:lstStyle/>
+          <a:p>
+            <a:pPr algn="ctr"/>
+            <a:r>
+              <a:rPr sz="2000" b="0" i="0">
+                <a:solidFill>
+                  <a:srgbClr val="828282"/>
+                </a:solidFill>
+                <a:latin typeface="Arial"/>
+              </a:rPr>
+              <a:t>見ることができます</a:t>
+            </a:r>
+          </a:p>
+        </p:txBody>
+      </p:sp>
     </p:spTree>
   </p:cSld>
   <p:clrMapOvr>
@@ -4983,6 +5613,76 @@
                 <a:latin typeface="Arial"/>
               </a:rPr>
               <a:t>Mesmo com falhas</a:t>
+            </a:r>
+          </a:p>
+        </p:txBody>
+      </p:sp>
+      <p:sp>
+        <p:nvSpPr>
+          <p:cNvPr id="4" name="TextBox 3"/>
+          <p:cNvSpPr txBox="1"/>
+          <p:nvPr/>
+        </p:nvSpPr>
+        <p:spPr>
+          <a:xfrm>
+            <a:off x="640080" y="4128516"/>
+            <a:ext cx="10911535" cy="310896"/>
+          </a:xfrm>
+          <a:prstGeom prst="rect">
+            <a:avLst/>
+          </a:prstGeom>
+          <a:noFill/>
+        </p:spPr>
+        <p:txBody>
+          <a:bodyPr wrap="square">
+            <a:spAutoFit/>
+          </a:bodyPr>
+          <a:lstStyle/>
+          <a:p>
+            <a:pPr algn="ctr"/>
+            <a:r>
+              <a:rPr sz="2000" b="0" i="0">
+                <a:solidFill>
+                  <a:srgbClr val="828282"/>
+                </a:solidFill>
+                <a:latin typeface="Arial"/>
+              </a:rPr>
+              <a:t>迷っていた私を見つけてくださった</a:t>
+            </a:r>
+          </a:p>
+        </p:txBody>
+      </p:sp>
+      <p:sp>
+        <p:nvSpPr>
+          <p:cNvPr id="5" name="TextBox 4"/>
+          <p:cNvSpPr txBox="1"/>
+          <p:nvPr/>
+        </p:nvSpPr>
+        <p:spPr>
+          <a:xfrm>
+            <a:off x="640080" y="4494276"/>
+            <a:ext cx="10911535" cy="310896"/>
+          </a:xfrm>
+          <a:prstGeom prst="rect">
+            <a:avLst/>
+          </a:prstGeom>
+          <a:noFill/>
+        </p:spPr>
+        <p:txBody>
+          <a:bodyPr wrap="square">
+            <a:spAutoFit/>
+          </a:bodyPr>
+          <a:lstStyle/>
+          <a:p>
+            <a:pPr algn="ctr"/>
+            <a:r>
+              <a:rPr sz="2000" b="0" i="0">
+                <a:solidFill>
+                  <a:srgbClr val="828282"/>
+                </a:solidFill>
+                <a:latin typeface="Arial"/>
+              </a:rPr>
+              <a:t>欠けがあっても</a:t>
             </a:r>
           </a:p>
         </p:txBody>
